--- a/10-Knowledge-Products/KP1-GEA/videos/module_6/en/decks/KP1_M6_6.1_Deck_v0.1.pptx
+++ b/10-Knowledge-Products/KP1-GEA/videos/module_6/en/decks/KP1_M6_6.1_Deck_v0.1.pptx
@@ -12953,7 +12953,7 @@
                 </a:solidFill>
                 <a:latin typeface="Arial"/>
               </a:rPr>
-              <a:t>Estonia — mature</a:t>
+              <a:t>Estonia — mature, and the reference the others are measured against</a:t>
             </a:r>
           </a:p>
           <a:p>
